--- a/我神真偉大.pptx
+++ b/我神真偉大.pptx
@@ -111,6 +111,11 @@
       </a:defRPr>
     </a:lvl9pPr>
   </p:defaultTextStyle>
+  <p:extLst>
+    <p:ext uri="{EFAFB233-063F-42B5-8137-9DF3F51BA10A}">
+      <p15:sldGuideLst xmlns:p15="http://schemas.microsoft.com/office/powerpoint/2012/main"/>
+    </p:ext>
+  </p:extLst>
 </p:presentation>
 </file>
 
@@ -152,7 +157,7 @@
           <a:lstStyle/>
           <a:p>
             <a:r>
-              <a:rPr lang="en-US" altLang="zh-TW" smtClean="0"/>
+              <a:rPr lang="en-US" altLang="zh-TW"/>
               <a:t>Click to edit Master title style</a:t>
             </a:r>
             <a:endParaRPr lang="zh-TW" altLang="en-US"/>
@@ -271,7 +276,7 @@
           </a:lstStyle>
           <a:p>
             <a:r>
-              <a:rPr lang="en-US" altLang="zh-TW" smtClean="0"/>
+              <a:rPr lang="en-US" altLang="zh-TW"/>
               <a:t>Click to edit Master subtitle style</a:t>
             </a:r>
             <a:endParaRPr lang="zh-TW" altLang="en-US"/>
@@ -295,7 +300,7 @@
           <a:p>
             <a:fld id="{E10093AE-C997-4515-AFDB-F32315071889}" type="datetimeFigureOut">
               <a:rPr lang="vi-VN" smtClean="0"/>
-              <a:t>29/04/2022</a:t>
+              <a:t>08/03/2025</a:t>
             </a:fld>
             <a:endParaRPr lang="vi-VN"/>
           </a:p>
@@ -389,7 +394,7 @@
           <a:lstStyle/>
           <a:p>
             <a:r>
-              <a:rPr lang="en-US" altLang="zh-TW" smtClean="0"/>
+              <a:rPr lang="en-US" altLang="zh-TW"/>
               <a:t>Click to edit Master title style</a:t>
             </a:r>
             <a:endParaRPr lang="zh-TW" altLang="en-US"/>
@@ -413,35 +418,35 @@
           <a:p>
             <a:pPr lvl="0"/>
             <a:r>
-              <a:rPr lang="en-US" altLang="zh-TW" smtClean="0"/>
+              <a:rPr lang="en-US" altLang="zh-TW"/>
               <a:t>Edit Master text styles</a:t>
             </a:r>
           </a:p>
           <a:p>
             <a:pPr lvl="1"/>
             <a:r>
-              <a:rPr lang="en-US" altLang="zh-TW" smtClean="0"/>
+              <a:rPr lang="en-US" altLang="zh-TW"/>
               <a:t>Second level</a:t>
             </a:r>
           </a:p>
           <a:p>
             <a:pPr lvl="2"/>
             <a:r>
-              <a:rPr lang="en-US" altLang="zh-TW" smtClean="0"/>
+              <a:rPr lang="en-US" altLang="zh-TW"/>
               <a:t>Third level</a:t>
             </a:r>
           </a:p>
           <a:p>
             <a:pPr lvl="3"/>
             <a:r>
-              <a:rPr lang="en-US" altLang="zh-TW" smtClean="0"/>
+              <a:rPr lang="en-US" altLang="zh-TW"/>
               <a:t>Fourth level</a:t>
             </a:r>
           </a:p>
           <a:p>
             <a:pPr lvl="4"/>
             <a:r>
-              <a:rPr lang="en-US" altLang="zh-TW" smtClean="0"/>
+              <a:rPr lang="en-US" altLang="zh-TW"/>
               <a:t>Fifth level</a:t>
             </a:r>
             <a:endParaRPr lang="zh-TW" altLang="en-US"/>
@@ -465,7 +470,7 @@
           <a:p>
             <a:fld id="{E10093AE-C997-4515-AFDB-F32315071889}" type="datetimeFigureOut">
               <a:rPr lang="vi-VN" smtClean="0"/>
-              <a:t>29/04/2022</a:t>
+              <a:t>08/03/2025</a:t>
             </a:fld>
             <a:endParaRPr lang="vi-VN"/>
           </a:p>
@@ -564,7 +569,7 @@
           <a:lstStyle/>
           <a:p>
             <a:r>
-              <a:rPr lang="en-US" altLang="zh-TW" smtClean="0"/>
+              <a:rPr lang="en-US" altLang="zh-TW"/>
               <a:t>Click to edit Master title style</a:t>
             </a:r>
             <a:endParaRPr lang="zh-TW" altLang="en-US"/>
@@ -593,35 +598,35 @@
           <a:p>
             <a:pPr lvl="0"/>
             <a:r>
-              <a:rPr lang="en-US" altLang="zh-TW" smtClean="0"/>
+              <a:rPr lang="en-US" altLang="zh-TW"/>
               <a:t>Edit Master text styles</a:t>
             </a:r>
           </a:p>
           <a:p>
             <a:pPr lvl="1"/>
             <a:r>
-              <a:rPr lang="en-US" altLang="zh-TW" smtClean="0"/>
+              <a:rPr lang="en-US" altLang="zh-TW"/>
               <a:t>Second level</a:t>
             </a:r>
           </a:p>
           <a:p>
             <a:pPr lvl="2"/>
             <a:r>
-              <a:rPr lang="en-US" altLang="zh-TW" smtClean="0"/>
+              <a:rPr lang="en-US" altLang="zh-TW"/>
               <a:t>Third level</a:t>
             </a:r>
           </a:p>
           <a:p>
             <a:pPr lvl="3"/>
             <a:r>
-              <a:rPr lang="en-US" altLang="zh-TW" smtClean="0"/>
+              <a:rPr lang="en-US" altLang="zh-TW"/>
               <a:t>Fourth level</a:t>
             </a:r>
           </a:p>
           <a:p>
             <a:pPr lvl="4"/>
             <a:r>
-              <a:rPr lang="en-US" altLang="zh-TW" smtClean="0"/>
+              <a:rPr lang="en-US" altLang="zh-TW"/>
               <a:t>Fifth level</a:t>
             </a:r>
             <a:endParaRPr lang="zh-TW" altLang="en-US"/>
@@ -645,7 +650,7 @@
           <a:p>
             <a:fld id="{E10093AE-C997-4515-AFDB-F32315071889}" type="datetimeFigureOut">
               <a:rPr lang="vi-VN" smtClean="0"/>
-              <a:t>29/04/2022</a:t>
+              <a:t>08/03/2025</a:t>
             </a:fld>
             <a:endParaRPr lang="vi-VN"/>
           </a:p>
@@ -739,7 +744,7 @@
           <a:lstStyle/>
           <a:p>
             <a:r>
-              <a:rPr lang="en-US" altLang="zh-TW" smtClean="0"/>
+              <a:rPr lang="en-US" altLang="zh-TW"/>
               <a:t>Click to edit Master title style</a:t>
             </a:r>
             <a:endParaRPr lang="zh-TW" altLang="en-US"/>
@@ -763,35 +768,35 @@
           <a:p>
             <a:pPr lvl="0"/>
             <a:r>
-              <a:rPr lang="en-US" altLang="zh-TW" smtClean="0"/>
+              <a:rPr lang="en-US" altLang="zh-TW"/>
               <a:t>Edit Master text styles</a:t>
             </a:r>
           </a:p>
           <a:p>
             <a:pPr lvl="1"/>
             <a:r>
-              <a:rPr lang="en-US" altLang="zh-TW" smtClean="0"/>
+              <a:rPr lang="en-US" altLang="zh-TW"/>
               <a:t>Second level</a:t>
             </a:r>
           </a:p>
           <a:p>
             <a:pPr lvl="2"/>
             <a:r>
-              <a:rPr lang="en-US" altLang="zh-TW" smtClean="0"/>
+              <a:rPr lang="en-US" altLang="zh-TW"/>
               <a:t>Third level</a:t>
             </a:r>
           </a:p>
           <a:p>
             <a:pPr lvl="3"/>
             <a:r>
-              <a:rPr lang="en-US" altLang="zh-TW" smtClean="0"/>
+              <a:rPr lang="en-US" altLang="zh-TW"/>
               <a:t>Fourth level</a:t>
             </a:r>
           </a:p>
           <a:p>
             <a:pPr lvl="4"/>
             <a:r>
-              <a:rPr lang="en-US" altLang="zh-TW" smtClean="0"/>
+              <a:rPr lang="en-US" altLang="zh-TW"/>
               <a:t>Fifth level</a:t>
             </a:r>
             <a:endParaRPr lang="zh-TW" altLang="en-US"/>
@@ -815,7 +820,7 @@
           <a:p>
             <a:fld id="{E10093AE-C997-4515-AFDB-F32315071889}" type="datetimeFigureOut">
               <a:rPr lang="vi-VN" smtClean="0"/>
-              <a:t>29/04/2022</a:t>
+              <a:t>08/03/2025</a:t>
             </a:fld>
             <a:endParaRPr lang="vi-VN"/>
           </a:p>
@@ -918,7 +923,7 @@
           </a:lstStyle>
           <a:p>
             <a:r>
-              <a:rPr lang="en-US" altLang="zh-TW" smtClean="0"/>
+              <a:rPr lang="en-US" altLang="zh-TW"/>
               <a:t>Click to edit Master title style</a:t>
             </a:r>
             <a:endParaRPr lang="zh-TW" altLang="en-US"/>
@@ -1038,7 +1043,7 @@
           <a:p>
             <a:pPr lvl="0"/>
             <a:r>
-              <a:rPr lang="en-US" altLang="zh-TW" smtClean="0"/>
+              <a:rPr lang="en-US" altLang="zh-TW"/>
               <a:t>Edit Master text styles</a:t>
             </a:r>
           </a:p>
@@ -1061,7 +1066,7 @@
           <a:p>
             <a:fld id="{E10093AE-C997-4515-AFDB-F32315071889}" type="datetimeFigureOut">
               <a:rPr lang="vi-VN" smtClean="0"/>
-              <a:t>29/04/2022</a:t>
+              <a:t>08/03/2025</a:t>
             </a:fld>
             <a:endParaRPr lang="vi-VN"/>
           </a:p>
@@ -1155,7 +1160,7 @@
           <a:lstStyle/>
           <a:p>
             <a:r>
-              <a:rPr lang="en-US" altLang="zh-TW" smtClean="0"/>
+              <a:rPr lang="en-US" altLang="zh-TW"/>
               <a:t>Click to edit Master title style</a:t>
             </a:r>
             <a:endParaRPr lang="zh-TW" altLang="en-US"/>
@@ -1212,35 +1217,35 @@
           <a:p>
             <a:pPr lvl="0"/>
             <a:r>
-              <a:rPr lang="en-US" altLang="zh-TW" smtClean="0"/>
+              <a:rPr lang="en-US" altLang="zh-TW"/>
               <a:t>Edit Master text styles</a:t>
             </a:r>
           </a:p>
           <a:p>
             <a:pPr lvl="1"/>
             <a:r>
-              <a:rPr lang="en-US" altLang="zh-TW" smtClean="0"/>
+              <a:rPr lang="en-US" altLang="zh-TW"/>
               <a:t>Second level</a:t>
             </a:r>
           </a:p>
           <a:p>
             <a:pPr lvl="2"/>
             <a:r>
-              <a:rPr lang="en-US" altLang="zh-TW" smtClean="0"/>
+              <a:rPr lang="en-US" altLang="zh-TW"/>
               <a:t>Third level</a:t>
             </a:r>
           </a:p>
           <a:p>
             <a:pPr lvl="3"/>
             <a:r>
-              <a:rPr lang="en-US" altLang="zh-TW" smtClean="0"/>
+              <a:rPr lang="en-US" altLang="zh-TW"/>
               <a:t>Fourth level</a:t>
             </a:r>
           </a:p>
           <a:p>
             <a:pPr lvl="4"/>
             <a:r>
-              <a:rPr lang="en-US" altLang="zh-TW" smtClean="0"/>
+              <a:rPr lang="en-US" altLang="zh-TW"/>
               <a:t>Fifth level</a:t>
             </a:r>
             <a:endParaRPr lang="zh-TW" altLang="en-US"/>
@@ -1297,35 +1302,35 @@
           <a:p>
             <a:pPr lvl="0"/>
             <a:r>
-              <a:rPr lang="en-US" altLang="zh-TW" smtClean="0"/>
+              <a:rPr lang="en-US" altLang="zh-TW"/>
               <a:t>Edit Master text styles</a:t>
             </a:r>
           </a:p>
           <a:p>
             <a:pPr lvl="1"/>
             <a:r>
-              <a:rPr lang="en-US" altLang="zh-TW" smtClean="0"/>
+              <a:rPr lang="en-US" altLang="zh-TW"/>
               <a:t>Second level</a:t>
             </a:r>
           </a:p>
           <a:p>
             <a:pPr lvl="2"/>
             <a:r>
-              <a:rPr lang="en-US" altLang="zh-TW" smtClean="0"/>
+              <a:rPr lang="en-US" altLang="zh-TW"/>
               <a:t>Third level</a:t>
             </a:r>
           </a:p>
           <a:p>
             <a:pPr lvl="3"/>
             <a:r>
-              <a:rPr lang="en-US" altLang="zh-TW" smtClean="0"/>
+              <a:rPr lang="en-US" altLang="zh-TW"/>
               <a:t>Fourth level</a:t>
             </a:r>
           </a:p>
           <a:p>
             <a:pPr lvl="4"/>
             <a:r>
-              <a:rPr lang="en-US" altLang="zh-TW" smtClean="0"/>
+              <a:rPr lang="en-US" altLang="zh-TW"/>
               <a:t>Fifth level</a:t>
             </a:r>
             <a:endParaRPr lang="zh-TW" altLang="en-US"/>
@@ -1349,7 +1354,7 @@
           <a:p>
             <a:fld id="{E10093AE-C997-4515-AFDB-F32315071889}" type="datetimeFigureOut">
               <a:rPr lang="vi-VN" smtClean="0"/>
-              <a:t>29/04/2022</a:t>
+              <a:t>08/03/2025</a:t>
             </a:fld>
             <a:endParaRPr lang="vi-VN"/>
           </a:p>
@@ -1447,7 +1452,7 @@
           </a:lstStyle>
           <a:p>
             <a:r>
-              <a:rPr lang="en-US" altLang="zh-TW" smtClean="0"/>
+              <a:rPr lang="en-US" altLang="zh-TW"/>
               <a:t>Click to edit Master title style</a:t>
             </a:r>
             <a:endParaRPr lang="zh-TW" altLang="en-US"/>
@@ -1513,7 +1518,7 @@
           <a:p>
             <a:pPr lvl="0"/>
             <a:r>
-              <a:rPr lang="en-US" altLang="zh-TW" smtClean="0"/>
+              <a:rPr lang="en-US" altLang="zh-TW"/>
               <a:t>Edit Master text styles</a:t>
             </a:r>
           </a:p>
@@ -1569,35 +1574,35 @@
           <a:p>
             <a:pPr lvl="0"/>
             <a:r>
-              <a:rPr lang="en-US" altLang="zh-TW" smtClean="0"/>
+              <a:rPr lang="en-US" altLang="zh-TW"/>
               <a:t>Edit Master text styles</a:t>
             </a:r>
           </a:p>
           <a:p>
             <a:pPr lvl="1"/>
             <a:r>
-              <a:rPr lang="en-US" altLang="zh-TW" smtClean="0"/>
+              <a:rPr lang="en-US" altLang="zh-TW"/>
               <a:t>Second level</a:t>
             </a:r>
           </a:p>
           <a:p>
             <a:pPr lvl="2"/>
             <a:r>
-              <a:rPr lang="en-US" altLang="zh-TW" smtClean="0"/>
+              <a:rPr lang="en-US" altLang="zh-TW"/>
               <a:t>Third level</a:t>
             </a:r>
           </a:p>
           <a:p>
             <a:pPr lvl="3"/>
             <a:r>
-              <a:rPr lang="en-US" altLang="zh-TW" smtClean="0"/>
+              <a:rPr lang="en-US" altLang="zh-TW"/>
               <a:t>Fourth level</a:t>
             </a:r>
           </a:p>
           <a:p>
             <a:pPr lvl="4"/>
             <a:r>
-              <a:rPr lang="en-US" altLang="zh-TW" smtClean="0"/>
+              <a:rPr lang="en-US" altLang="zh-TW"/>
               <a:t>Fifth level</a:t>
             </a:r>
             <a:endParaRPr lang="zh-TW" altLang="en-US"/>
@@ -1663,7 +1668,7 @@
           <a:p>
             <a:pPr lvl="0"/>
             <a:r>
-              <a:rPr lang="en-US" altLang="zh-TW" smtClean="0"/>
+              <a:rPr lang="en-US" altLang="zh-TW"/>
               <a:t>Edit Master text styles</a:t>
             </a:r>
           </a:p>
@@ -1719,35 +1724,35 @@
           <a:p>
             <a:pPr lvl="0"/>
             <a:r>
-              <a:rPr lang="en-US" altLang="zh-TW" smtClean="0"/>
+              <a:rPr lang="en-US" altLang="zh-TW"/>
               <a:t>Edit Master text styles</a:t>
             </a:r>
           </a:p>
           <a:p>
             <a:pPr lvl="1"/>
             <a:r>
-              <a:rPr lang="en-US" altLang="zh-TW" smtClean="0"/>
+              <a:rPr lang="en-US" altLang="zh-TW"/>
               <a:t>Second level</a:t>
             </a:r>
           </a:p>
           <a:p>
             <a:pPr lvl="2"/>
             <a:r>
-              <a:rPr lang="en-US" altLang="zh-TW" smtClean="0"/>
+              <a:rPr lang="en-US" altLang="zh-TW"/>
               <a:t>Third level</a:t>
             </a:r>
           </a:p>
           <a:p>
             <a:pPr lvl="3"/>
             <a:r>
-              <a:rPr lang="en-US" altLang="zh-TW" smtClean="0"/>
+              <a:rPr lang="en-US" altLang="zh-TW"/>
               <a:t>Fourth level</a:t>
             </a:r>
           </a:p>
           <a:p>
             <a:pPr lvl="4"/>
             <a:r>
-              <a:rPr lang="en-US" altLang="zh-TW" smtClean="0"/>
+              <a:rPr lang="en-US" altLang="zh-TW"/>
               <a:t>Fifth level</a:t>
             </a:r>
             <a:endParaRPr lang="zh-TW" altLang="en-US"/>
@@ -1771,7 +1776,7 @@
           <a:p>
             <a:fld id="{E10093AE-C997-4515-AFDB-F32315071889}" type="datetimeFigureOut">
               <a:rPr lang="vi-VN" smtClean="0"/>
-              <a:t>29/04/2022</a:t>
+              <a:t>08/03/2025</a:t>
             </a:fld>
             <a:endParaRPr lang="vi-VN"/>
           </a:p>
@@ -1865,7 +1870,7 @@
           <a:lstStyle/>
           <a:p>
             <a:r>
-              <a:rPr lang="en-US" altLang="zh-TW" smtClean="0"/>
+              <a:rPr lang="en-US" altLang="zh-TW"/>
               <a:t>Click to edit Master title style</a:t>
             </a:r>
             <a:endParaRPr lang="zh-TW" altLang="en-US"/>
@@ -1889,7 +1894,7 @@
           <a:p>
             <a:fld id="{E10093AE-C997-4515-AFDB-F32315071889}" type="datetimeFigureOut">
               <a:rPr lang="vi-VN" smtClean="0"/>
-              <a:t>29/04/2022</a:t>
+              <a:t>08/03/2025</a:t>
             </a:fld>
             <a:endParaRPr lang="vi-VN"/>
           </a:p>
@@ -1984,7 +1989,7 @@
           <a:p>
             <a:fld id="{E10093AE-C997-4515-AFDB-F32315071889}" type="datetimeFigureOut">
               <a:rPr lang="vi-VN" smtClean="0"/>
-              <a:t>29/04/2022</a:t>
+              <a:t>08/03/2025</a:t>
             </a:fld>
             <a:endParaRPr lang="vi-VN"/>
           </a:p>
@@ -2087,7 +2092,7 @@
           </a:lstStyle>
           <a:p>
             <a:r>
-              <a:rPr lang="en-US" altLang="zh-TW" smtClean="0"/>
+              <a:rPr lang="en-US" altLang="zh-TW"/>
               <a:t>Click to edit Master title style</a:t>
             </a:r>
             <a:endParaRPr lang="zh-TW" altLang="en-US"/>
@@ -2144,35 +2149,35 @@
           <a:p>
             <a:pPr lvl="0"/>
             <a:r>
-              <a:rPr lang="en-US" altLang="zh-TW" smtClean="0"/>
+              <a:rPr lang="en-US" altLang="zh-TW"/>
               <a:t>Edit Master text styles</a:t>
             </a:r>
           </a:p>
           <a:p>
             <a:pPr lvl="1"/>
             <a:r>
-              <a:rPr lang="en-US" altLang="zh-TW" smtClean="0"/>
+              <a:rPr lang="en-US" altLang="zh-TW"/>
               <a:t>Second level</a:t>
             </a:r>
           </a:p>
           <a:p>
             <a:pPr lvl="2"/>
             <a:r>
-              <a:rPr lang="en-US" altLang="zh-TW" smtClean="0"/>
+              <a:rPr lang="en-US" altLang="zh-TW"/>
               <a:t>Third level</a:t>
             </a:r>
           </a:p>
           <a:p>
             <a:pPr lvl="3"/>
             <a:r>
-              <a:rPr lang="en-US" altLang="zh-TW" smtClean="0"/>
+              <a:rPr lang="en-US" altLang="zh-TW"/>
               <a:t>Fourth level</a:t>
             </a:r>
           </a:p>
           <a:p>
             <a:pPr lvl="4"/>
             <a:r>
-              <a:rPr lang="en-US" altLang="zh-TW" smtClean="0"/>
+              <a:rPr lang="en-US" altLang="zh-TW"/>
               <a:t>Fifth level</a:t>
             </a:r>
             <a:endParaRPr lang="zh-TW" altLang="en-US"/>
@@ -2238,7 +2243,7 @@
           <a:p>
             <a:pPr lvl="0"/>
             <a:r>
-              <a:rPr lang="en-US" altLang="zh-TW" smtClean="0"/>
+              <a:rPr lang="en-US" altLang="zh-TW"/>
               <a:t>Edit Master text styles</a:t>
             </a:r>
           </a:p>
@@ -2261,7 +2266,7 @@
           <a:p>
             <a:fld id="{E10093AE-C997-4515-AFDB-F32315071889}" type="datetimeFigureOut">
               <a:rPr lang="vi-VN" smtClean="0"/>
-              <a:t>29/04/2022</a:t>
+              <a:t>08/03/2025</a:t>
             </a:fld>
             <a:endParaRPr lang="vi-VN"/>
           </a:p>
@@ -2364,7 +2369,7 @@
           </a:lstStyle>
           <a:p>
             <a:r>
-              <a:rPr lang="en-US" altLang="zh-TW" smtClean="0"/>
+              <a:rPr lang="en-US" altLang="zh-TW"/>
               <a:t>Click to edit Master title style</a:t>
             </a:r>
             <a:endParaRPr lang="zh-TW" altLang="en-US"/>
@@ -2429,7 +2434,7 @@
           </a:lstStyle>
           <a:p>
             <a:r>
-              <a:rPr lang="en-US" altLang="zh-TW" smtClean="0"/>
+              <a:rPr lang="en-US" altLang="zh-TW"/>
               <a:t>Click icon to add picture</a:t>
             </a:r>
             <a:endParaRPr lang="zh-TW" altLang="en-US"/>
@@ -2495,7 +2500,7 @@
           <a:p>
             <a:pPr lvl="0"/>
             <a:r>
-              <a:rPr lang="en-US" altLang="zh-TW" smtClean="0"/>
+              <a:rPr lang="en-US" altLang="zh-TW"/>
               <a:t>Edit Master text styles</a:t>
             </a:r>
           </a:p>
@@ -2518,7 +2523,7 @@
           <a:p>
             <a:fld id="{E10093AE-C997-4515-AFDB-F32315071889}" type="datetimeFigureOut">
               <a:rPr lang="vi-VN" smtClean="0"/>
-              <a:t>29/04/2022</a:t>
+              <a:t>08/03/2025</a:t>
             </a:fld>
             <a:endParaRPr lang="vi-VN"/>
           </a:p>
@@ -2632,10 +2637,9 @@
           <a:lstStyle/>
           <a:p>
             <a:r>
-              <a:rPr lang="zh-TW" altLang="en-US" smtClean="0"/>
+              <a:rPr lang="zh-TW" altLang="en-US"/>
               <a:t>按一下以編輯母片標題樣式</a:t>
             </a:r>
-            <a:endParaRPr lang="zh-TW" altLang="en-US"/>
           </a:p>
         </p:txBody>
       </p:sp>
@@ -2666,38 +2670,37 @@
           <a:p>
             <a:pPr lvl="0"/>
             <a:r>
-              <a:rPr lang="zh-TW" altLang="en-US" smtClean="0"/>
+              <a:rPr lang="zh-TW" altLang="en-US"/>
               <a:t>按一下以編輯母片文字樣式</a:t>
             </a:r>
           </a:p>
           <a:p>
             <a:pPr lvl="1"/>
             <a:r>
-              <a:rPr lang="zh-TW" altLang="en-US" smtClean="0"/>
+              <a:rPr lang="zh-TW" altLang="en-US"/>
               <a:t>第二層</a:t>
             </a:r>
           </a:p>
           <a:p>
             <a:pPr lvl="2"/>
             <a:r>
-              <a:rPr lang="zh-TW" altLang="en-US" smtClean="0"/>
+              <a:rPr lang="zh-TW" altLang="en-US"/>
               <a:t>第三層</a:t>
             </a:r>
           </a:p>
           <a:p>
             <a:pPr lvl="3"/>
             <a:r>
-              <a:rPr lang="zh-TW" altLang="en-US" smtClean="0"/>
+              <a:rPr lang="zh-TW" altLang="en-US"/>
               <a:t>第四層</a:t>
             </a:r>
           </a:p>
           <a:p>
             <a:pPr lvl="4"/>
             <a:r>
-              <a:rPr lang="zh-TW" altLang="en-US" smtClean="0"/>
+              <a:rPr lang="zh-TW" altLang="en-US"/>
               <a:t>第五層</a:t>
             </a:r>
-            <a:endParaRPr lang="zh-TW" altLang="en-US"/>
           </a:p>
         </p:txBody>
       </p:sp>
@@ -2736,7 +2739,7 @@
           <a:p>
             <a:fld id="{E10093AE-C997-4515-AFDB-F32315071889}" type="datetimeFigureOut">
               <a:rPr lang="vi-VN" smtClean="0"/>
-              <a:t>29/04/2022</a:t>
+              <a:t>08/03/2025</a:t>
             </a:fld>
             <a:endParaRPr lang="vi-VN"/>
           </a:p>
@@ -3134,7 +3137,7 @@
           <a:lstStyle/>
           <a:p>
             <a:r>
-              <a:rPr lang="zh-CN" altLang="en-US" sz="7200" b="1" i="1" dirty="0" smtClean="0">
+              <a:rPr lang="zh-CN" altLang="en-US" sz="7200" b="1" i="1" dirty="0">
                 <a:solidFill>
                   <a:srgbClr val="660033"/>
                 </a:solidFill>
@@ -3148,24 +3151,7 @@
                 <a:latin typeface="微軟正黑體" pitchFamily="34" charset="-120"/>
                 <a:ea typeface="微軟正黑體" pitchFamily="34" charset="-120"/>
               </a:rPr>
-              <a:t>我</a:t>
-            </a:r>
-            <a:r>
-              <a:rPr lang="zh-CN" altLang="en-US" sz="7200" b="1" i="1" dirty="0">
-                <a:solidFill>
-                  <a:srgbClr val="660033"/>
-                </a:solidFill>
-                <a:effectLst>
-                  <a:outerShdw blurRad="38100" dist="38100" dir="2700000" algn="tl">
-                    <a:srgbClr val="000000">
-                      <a:alpha val="43137"/>
-                    </a:srgbClr>
-                  </a:outerShdw>
-                </a:effectLst>
-                <a:latin typeface="微軟正黑體" pitchFamily="34" charset="-120"/>
-                <a:ea typeface="微軟正黑體" pitchFamily="34" charset="-120"/>
-              </a:rPr>
-              <a:t>神真偉大</a:t>
+              <a:t>我神真偉大</a:t>
             </a:r>
           </a:p>
         </p:txBody>
@@ -3226,56 +3212,16 @@
               <a:buNone/>
             </a:pPr>
             <a:r>
-              <a:rPr lang="zh-TW" altLang="en-US" sz="6400" b="1" dirty="0" smtClean="0">
+              <a:rPr lang="zh-TW" altLang="en-US" sz="6400" b="1" dirty="0">
                 <a:solidFill>
                   <a:srgbClr val="660033"/>
                 </a:solidFill>
                 <a:latin typeface="微軟正黑體" pitchFamily="34" charset="-120"/>
                 <a:ea typeface="微軟正黑體" pitchFamily="34" charset="-120"/>
               </a:rPr>
-              <a:t>尊</a:t>
-            </a:r>
-            <a:r>
-              <a:rPr lang="zh-TW" altLang="en-US" sz="6400" b="1" dirty="0">
-                <a:solidFill>
-                  <a:srgbClr val="660033"/>
-                </a:solidFill>
-                <a:latin typeface="微軟正黑體" pitchFamily="34" charset="-120"/>
-                <a:ea typeface="微軟正黑體" pitchFamily="34" charset="-120"/>
-              </a:rPr>
-              <a:t>貴榮耀君王 </a:t>
-            </a:r>
-            <a:r>
-              <a:rPr lang="zh-TW" altLang="en-US" sz="6400" b="1" dirty="0" smtClean="0">
-                <a:solidFill>
-                  <a:srgbClr val="660033"/>
-                </a:solidFill>
-                <a:latin typeface="微軟正黑體" pitchFamily="34" charset="-120"/>
-                <a:ea typeface="微軟正黑體" pitchFamily="34" charset="-120"/>
-              </a:rPr>
-              <a:t>  在</a:t>
-            </a:r>
-            <a:r>
-              <a:rPr lang="zh-TW" altLang="en-US" sz="6400" b="1" dirty="0">
-                <a:solidFill>
-                  <a:srgbClr val="660033"/>
-                </a:solidFill>
-                <a:latin typeface="微軟正黑體" pitchFamily="34" charset="-120"/>
-                <a:ea typeface="微軟正黑體" pitchFamily="34" charset="-120"/>
-              </a:rPr>
-              <a:t>全地之</a:t>
-            </a:r>
-            <a:r>
-              <a:rPr lang="zh-TW" altLang="en-US" sz="6400" b="1" dirty="0" smtClean="0">
-                <a:solidFill>
-                  <a:srgbClr val="660033"/>
-                </a:solidFill>
-                <a:latin typeface="微軟正黑體" pitchFamily="34" charset="-120"/>
-                <a:ea typeface="微軟正黑體" pitchFamily="34" charset="-120"/>
-              </a:rPr>
-              <a:t>上</a:t>
-            </a:r>
-            <a:endParaRPr lang="en-US" altLang="zh-TW" sz="6400" b="1" dirty="0" smtClean="0">
+              <a:t>尊貴榮耀君王   在全地之上</a:t>
+            </a:r>
+            <a:endParaRPr lang="en-US" altLang="zh-TW" sz="6400" b="1" dirty="0">
               <a:solidFill>
                 <a:srgbClr val="660033"/>
               </a:solidFill>
@@ -3288,44 +3234,14 @@
               <a:buNone/>
             </a:pPr>
             <a:r>
-              <a:rPr lang="zh-TW" altLang="en-US" sz="6400" b="1" dirty="0" smtClean="0">
+              <a:rPr lang="zh-TW" altLang="en-US" sz="6400" b="1" dirty="0">
                 <a:solidFill>
                   <a:srgbClr val="660033"/>
                 </a:solidFill>
                 <a:latin typeface="微軟正黑體" pitchFamily="34" charset="-120"/>
                 <a:ea typeface="微軟正黑體" pitchFamily="34" charset="-120"/>
               </a:rPr>
-              <a:t>願</a:t>
-            </a:r>
-            <a:r>
-              <a:rPr lang="zh-TW" altLang="en-US" sz="6400" b="1" dirty="0">
-                <a:solidFill>
-                  <a:srgbClr val="660033"/>
-                </a:solidFill>
-                <a:latin typeface="微軟正黑體" pitchFamily="34" charset="-120"/>
-                <a:ea typeface="微軟正黑體" pitchFamily="34" charset="-120"/>
-              </a:rPr>
-              <a:t>萬民都喜樂 </a:t>
-            </a:r>
-            <a:r>
-              <a:rPr lang="zh-TW" altLang="en-US" sz="6400" b="1" dirty="0" smtClean="0">
-                <a:solidFill>
-                  <a:srgbClr val="660033"/>
-                </a:solidFill>
-                <a:latin typeface="微軟正黑體" pitchFamily="34" charset="-120"/>
-                <a:ea typeface="微軟正黑體" pitchFamily="34" charset="-120"/>
-              </a:rPr>
-              <a:t>  全</a:t>
-            </a:r>
-            <a:r>
-              <a:rPr lang="zh-TW" altLang="en-US" sz="6400" b="1" dirty="0">
-                <a:solidFill>
-                  <a:srgbClr val="660033"/>
-                </a:solidFill>
-                <a:latin typeface="微軟正黑體" pitchFamily="34" charset="-120"/>
-                <a:ea typeface="微軟正黑體" pitchFamily="34" charset="-120"/>
-              </a:rPr>
-              <a:t>地都喜樂</a:t>
+              <a:t>願萬民都喜樂   全地都喜樂</a:t>
             </a:r>
             <a:endParaRPr lang="en-US" altLang="zh-TW" sz="6400" b="1" dirty="0">
               <a:solidFill>
@@ -3371,17 +3287,17 @@
               <a:t>( </a:t>
             </a:r>
             <a:r>
-              <a:rPr lang="zh-CN" altLang="en-US" sz="4267" b="1" dirty="0" smtClean="0">
+              <a:rPr lang="zh-CN" altLang="en-US" sz="4267" b="1" dirty="0">
                 <a:solidFill>
                   <a:srgbClr val="660033"/>
                 </a:solidFill>
                 <a:latin typeface="Microsoft JhengHei" panose="020B0604030504040204" pitchFamily="34" charset="-120"/>
                 <a:ea typeface="Microsoft JhengHei" panose="020B0604030504040204" pitchFamily="34" charset="-120"/>
               </a:rPr>
-              <a:t>正</a:t>
-            </a:r>
-            <a:r>
-              <a:rPr lang="en-US" altLang="zh-CN" sz="4267" b="1" dirty="0" smtClean="0">
+              <a:t>正歌</a:t>
+            </a:r>
+            <a:r>
+              <a:rPr lang="en-US" altLang="zh-CN" sz="4267" b="1" dirty="0">
                 <a:solidFill>
                   <a:srgbClr val="660033"/>
                 </a:solidFill>
@@ -3391,24 +3307,14 @@
               <a:t> 1</a:t>
             </a:r>
             <a:r>
-              <a:rPr lang="en-US" sz="4267" b="1" dirty="0" smtClean="0">
+              <a:rPr lang="en-US" sz="4267" b="1" dirty="0">
                 <a:solidFill>
                   <a:srgbClr val="660033"/>
                 </a:solidFill>
                 <a:latin typeface="Microsoft JhengHei" panose="020B0604030504040204" pitchFamily="34" charset="-120"/>
                 <a:ea typeface="Microsoft JhengHei" panose="020B0604030504040204" pitchFamily="34" charset="-120"/>
               </a:rPr>
-              <a:t> </a:t>
-            </a:r>
-            <a:r>
-              <a:rPr lang="en-US" sz="4267" b="1" dirty="0">
-                <a:solidFill>
-                  <a:srgbClr val="660033"/>
-                </a:solidFill>
-                <a:latin typeface="Microsoft JhengHei" panose="020B0604030504040204" pitchFamily="34" charset="-120"/>
-                <a:ea typeface="Microsoft JhengHei" panose="020B0604030504040204" pitchFamily="34" charset="-120"/>
-              </a:rPr>
-              <a:t>)</a:t>
+              <a:t> )</a:t>
             </a:r>
             <a:endParaRPr lang="vi-VN" sz="4267" b="1" dirty="0">
               <a:solidFill>
@@ -3475,7 +3381,7 @@
               <a:buNone/>
             </a:pPr>
             <a:r>
-              <a:rPr lang="zh-TW" altLang="en-US" sz="6400" b="1" dirty="0" smtClean="0">
+              <a:rPr lang="zh-TW" altLang="en-US" sz="6400" b="1" dirty="0">
                 <a:solidFill>
                   <a:srgbClr val="660033"/>
                 </a:solidFill>
@@ -3485,64 +3391,24 @@
               <a:t>主</a:t>
             </a:r>
             <a:r>
-              <a:rPr lang="zh-CN" altLang="en-US" sz="6400" b="1" dirty="0" smtClean="0">
+              <a:rPr lang="zh-CN" altLang="en-US" sz="6400" b="1" dirty="0">
                 <a:solidFill>
                   <a:srgbClr val="660033"/>
                 </a:solidFill>
                 <a:latin typeface="微軟正黑體" pitchFamily="34" charset="-120"/>
                 <a:ea typeface="微軟正黑體" pitchFamily="34" charset="-120"/>
               </a:rPr>
-              <a:t>袮</a:t>
-            </a:r>
-            <a:r>
-              <a:rPr lang="zh-TW" altLang="en-US" sz="6400" b="1" dirty="0" smtClean="0">
+              <a:t>祢</a:t>
+            </a:r>
+            <a:r>
+              <a:rPr lang="zh-TW" altLang="en-US" sz="6400" b="1" dirty="0">
                 <a:solidFill>
                   <a:srgbClr val="660033"/>
                 </a:solidFill>
                 <a:latin typeface="微軟正黑體" pitchFamily="34" charset="-120"/>
                 <a:ea typeface="微軟正黑體" pitchFamily="34" charset="-120"/>
               </a:rPr>
-              <a:t>滿</a:t>
-            </a:r>
-            <a:r>
-              <a:rPr lang="zh-TW" altLang="en-US" sz="6400" b="1" dirty="0">
-                <a:solidFill>
-                  <a:srgbClr val="660033"/>
-                </a:solidFill>
-                <a:latin typeface="微軟正黑體" pitchFamily="34" charset="-120"/>
-                <a:ea typeface="微軟正黑體" pitchFamily="34" charset="-120"/>
-              </a:rPr>
-              <a:t>有榮光 </a:t>
-            </a:r>
-            <a:r>
-              <a:rPr lang="zh-TW" altLang="en-US" sz="6400" b="1" dirty="0">
-                <a:solidFill>
-                  <a:srgbClr val="660033"/>
-                </a:solidFill>
-                <a:latin typeface="微軟正黑體" pitchFamily="34" charset="-120"/>
-                <a:ea typeface="微軟正黑體" pitchFamily="34" charset="-120"/>
-              </a:rPr>
-              <a:t> 黑</a:t>
-            </a:r>
-            <a:r>
-              <a:rPr lang="zh-TW" altLang="en-US" sz="6400" b="1" dirty="0">
-                <a:solidFill>
-                  <a:srgbClr val="660033"/>
-                </a:solidFill>
-                <a:latin typeface="微軟正黑體" pitchFamily="34" charset="-120"/>
-                <a:ea typeface="微軟正黑體" pitchFamily="34" charset="-120"/>
-              </a:rPr>
-              <a:t>暗都躲</a:t>
-            </a:r>
-            <a:r>
-              <a:rPr lang="zh-TW" altLang="en-US" sz="6400" b="1" dirty="0">
-                <a:solidFill>
-                  <a:srgbClr val="660033"/>
-                </a:solidFill>
-                <a:latin typeface="微軟正黑體" pitchFamily="34" charset="-120"/>
-                <a:ea typeface="微軟正黑體" pitchFamily="34" charset="-120"/>
-              </a:rPr>
-              <a:t>藏</a:t>
+              <a:t>滿有榮光  黑暗都躲藏</a:t>
             </a:r>
             <a:endParaRPr lang="en-US" altLang="zh-TW" sz="6400" b="1" dirty="0">
               <a:solidFill>
@@ -3564,37 +3430,7 @@
                 <a:latin typeface="微軟正黑體" pitchFamily="34" charset="-120"/>
                 <a:ea typeface="微軟正黑體" pitchFamily="34" charset="-120"/>
               </a:rPr>
-              <a:t>萬</a:t>
-            </a:r>
-            <a:r>
-              <a:rPr lang="zh-TW" altLang="en-US" sz="6400" b="1" dirty="0">
-                <a:solidFill>
-                  <a:srgbClr val="660033"/>
-                </a:solidFill>
-                <a:latin typeface="微軟正黑體" pitchFamily="34" charset="-120"/>
-                <a:ea typeface="微軟正黑體" pitchFamily="34" charset="-120"/>
-              </a:rPr>
-              <a:t>民高聲</a:t>
-            </a:r>
-            <a:r>
-              <a:rPr lang="zh-TW" altLang="en-US" sz="6400" b="1" dirty="0">
-                <a:solidFill>
-                  <a:srgbClr val="660033"/>
-                </a:solidFill>
-                <a:latin typeface="微軟正黑體" pitchFamily="34" charset="-120"/>
-                <a:ea typeface="微軟正黑體" pitchFamily="34" charset="-120"/>
-              </a:rPr>
-              <a:t>唱  </a:t>
-            </a:r>
-            <a:r>
-              <a:rPr lang="zh-TW" altLang="en-US" sz="6400" b="1" dirty="0">
-                <a:solidFill>
-                  <a:srgbClr val="660033"/>
-                </a:solidFill>
-                <a:latin typeface="微軟正黑體" pitchFamily="34" charset="-120"/>
-                <a:ea typeface="微軟正黑體" pitchFamily="34" charset="-120"/>
-              </a:rPr>
-              <a:t>齊來高聲唱</a:t>
+              <a:t>萬民高聲唱  齊來高聲唱</a:t>
             </a:r>
             <a:endParaRPr lang="en-US" altLang="zh-TW" sz="6400" b="1" dirty="0">
               <a:solidFill>
@@ -3640,17 +3476,17 @@
               <a:t>( </a:t>
             </a:r>
             <a:r>
-              <a:rPr lang="zh-CN" altLang="en-US" sz="4267" b="1" dirty="0" smtClean="0">
+              <a:rPr lang="zh-CN" altLang="en-US" sz="4267" b="1" dirty="0">
                 <a:solidFill>
                   <a:srgbClr val="660033"/>
                 </a:solidFill>
                 <a:latin typeface="Microsoft JhengHei" panose="020B0604030504040204" pitchFamily="34" charset="-120"/>
                 <a:ea typeface="Microsoft JhengHei" panose="020B0604030504040204" pitchFamily="34" charset="-120"/>
               </a:rPr>
-              <a:t>正</a:t>
-            </a:r>
-            <a:r>
-              <a:rPr lang="en-US" altLang="zh-CN" sz="4267" b="1" dirty="0" smtClean="0">
+              <a:t>正歌</a:t>
+            </a:r>
+            <a:r>
+              <a:rPr lang="en-US" altLang="zh-CN" sz="4267" b="1" dirty="0">
                 <a:solidFill>
                   <a:srgbClr val="660033"/>
                 </a:solidFill>
@@ -3660,24 +3496,14 @@
               <a:t> 1</a:t>
             </a:r>
             <a:r>
-              <a:rPr lang="en-US" sz="4267" b="1" dirty="0" smtClean="0">
+              <a:rPr lang="en-US" sz="4267" b="1" dirty="0">
                 <a:solidFill>
                   <a:srgbClr val="660033"/>
                 </a:solidFill>
                 <a:latin typeface="Microsoft JhengHei" panose="020B0604030504040204" pitchFamily="34" charset="-120"/>
                 <a:ea typeface="Microsoft JhengHei" panose="020B0604030504040204" pitchFamily="34" charset="-120"/>
               </a:rPr>
-              <a:t> </a:t>
-            </a:r>
-            <a:r>
-              <a:rPr lang="en-US" sz="4267" b="1" dirty="0">
-                <a:solidFill>
-                  <a:srgbClr val="660033"/>
-                </a:solidFill>
-                <a:latin typeface="Microsoft JhengHei" panose="020B0604030504040204" pitchFamily="34" charset="-120"/>
-                <a:ea typeface="Microsoft JhengHei" panose="020B0604030504040204" pitchFamily="34" charset="-120"/>
-              </a:rPr>
-              <a:t>)</a:t>
+              <a:t> )</a:t>
             </a:r>
             <a:endParaRPr lang="vi-VN" sz="4267" b="1" dirty="0">
               <a:solidFill>
@@ -3751,29 +3577,9 @@
                 <a:latin typeface="微軟正黑體" pitchFamily="34" charset="-120"/>
                 <a:ea typeface="微軟正黑體" pitchFamily="34" charset="-120"/>
               </a:rPr>
-              <a:t>我</a:t>
-            </a:r>
-            <a:r>
-              <a:rPr lang="zh-TW" altLang="en-US" sz="6400" b="1" dirty="0" smtClean="0">
-                <a:solidFill>
-                  <a:srgbClr val="660033"/>
-                </a:solidFill>
-                <a:latin typeface="微軟正黑體" pitchFamily="34" charset="-120"/>
-                <a:ea typeface="微軟正黑體" pitchFamily="34" charset="-120"/>
-              </a:rPr>
-              <a:t>神   </a:t>
-            </a:r>
-            <a:r>
-              <a:rPr lang="zh-TW" altLang="en-US" sz="6400" b="1" dirty="0">
-                <a:solidFill>
-                  <a:srgbClr val="660033"/>
-                </a:solidFill>
-                <a:latin typeface="微軟正黑體" pitchFamily="34" charset="-120"/>
-                <a:ea typeface="微軟正黑體" pitchFamily="34" charset="-120"/>
-              </a:rPr>
-              <a:t>真偉大 </a:t>
-            </a:r>
-            <a:endParaRPr lang="en-US" altLang="zh-TW" sz="6400" b="1" dirty="0" smtClean="0">
+              <a:t>我神   真偉大 </a:t>
+            </a:r>
+            <a:endParaRPr lang="en-US" altLang="zh-TW" sz="6400" b="1" dirty="0">
               <a:solidFill>
                 <a:srgbClr val="660033"/>
               </a:solidFill>
@@ -3786,7 +3592,7 @@
               <a:buNone/>
             </a:pPr>
             <a:r>
-              <a:rPr lang="zh-TW" altLang="en-US" sz="6400" b="1" dirty="0" smtClean="0">
+              <a:rPr lang="zh-TW" altLang="en-US" sz="6400" b="1" dirty="0">
                 <a:solidFill>
                   <a:srgbClr val="660033"/>
                 </a:solidFill>
@@ -3803,27 +3609,17 @@
                 <a:latin typeface="微軟正黑體" pitchFamily="34" charset="-120"/>
                 <a:ea typeface="微軟正黑體" pitchFamily="34" charset="-120"/>
               </a:rPr>
-              <a:t>袮</a:t>
-            </a:r>
-            <a:r>
-              <a:rPr lang="zh-TW" altLang="en-US" sz="6400" b="1" dirty="0" smtClean="0">
+              <a:t>祢</a:t>
+            </a:r>
+            <a:r>
+              <a:rPr lang="zh-TW" altLang="en-US" sz="6400" b="1" dirty="0">
                 <a:solidFill>
                   <a:srgbClr val="660033"/>
                 </a:solidFill>
                 <a:latin typeface="微軟正黑體" pitchFamily="34" charset="-120"/>
                 <a:ea typeface="微軟正黑體" pitchFamily="34" charset="-120"/>
               </a:rPr>
-              <a:t>聖名   </a:t>
-            </a:r>
-            <a:r>
-              <a:rPr lang="zh-TW" altLang="en-US" sz="6400" b="1" dirty="0">
-                <a:solidFill>
-                  <a:srgbClr val="660033"/>
-                </a:solidFill>
-                <a:latin typeface="微軟正黑體" pitchFamily="34" charset="-120"/>
-                <a:ea typeface="微軟正黑體" pitchFamily="34" charset="-120"/>
-              </a:rPr>
-              <a:t>真偉大</a:t>
+              <a:t>聖名   真偉大</a:t>
             </a:r>
             <a:endParaRPr lang="en-US" altLang="zh-TW" sz="6400" b="1" dirty="0">
               <a:solidFill>
@@ -3869,34 +3665,24 @@
               <a:t>( </a:t>
             </a:r>
             <a:r>
-              <a:rPr lang="zh-CN" altLang="en-US" sz="4267" b="1" dirty="0" smtClean="0">
+              <a:rPr lang="zh-CN" altLang="en-US" sz="4267" b="1" dirty="0">
                 <a:solidFill>
                   <a:srgbClr val="660033"/>
                 </a:solidFill>
                 <a:latin typeface="Microsoft JhengHei" panose="020B0604030504040204" pitchFamily="34" charset="-120"/>
                 <a:ea typeface="Microsoft JhengHei" panose="020B0604030504040204" pitchFamily="34" charset="-120"/>
               </a:rPr>
-              <a:t>副</a:t>
-            </a:r>
-            <a:r>
-              <a:rPr lang="en-US" sz="4267" b="1" dirty="0" smtClean="0">
+              <a:t>副歌</a:t>
+            </a:r>
+            <a:r>
+              <a:rPr lang="en-US" sz="4267" b="1" dirty="0">
                 <a:solidFill>
                   <a:srgbClr val="660033"/>
                 </a:solidFill>
                 <a:latin typeface="Microsoft JhengHei" panose="020B0604030504040204" pitchFamily="34" charset="-120"/>
                 <a:ea typeface="Microsoft JhengHei" panose="020B0604030504040204" pitchFamily="34" charset="-120"/>
               </a:rPr>
-              <a:t> </a:t>
-            </a:r>
-            <a:r>
-              <a:rPr lang="en-US" sz="4267" b="1" dirty="0">
-                <a:solidFill>
-                  <a:srgbClr val="660033"/>
-                </a:solidFill>
-                <a:latin typeface="Microsoft JhengHei" panose="020B0604030504040204" pitchFamily="34" charset="-120"/>
-                <a:ea typeface="Microsoft JhengHei" panose="020B0604030504040204" pitchFamily="34" charset="-120"/>
-              </a:rPr>
-              <a:t>)</a:t>
+              <a:t> )</a:t>
             </a:r>
             <a:endParaRPr lang="vi-VN" sz="4267" b="1" dirty="0">
               <a:solidFill>
@@ -3970,17 +3756,7 @@
                 <a:latin typeface="微軟正黑體" pitchFamily="34" charset="-120"/>
                 <a:ea typeface="微軟正黑體" pitchFamily="34" charset="-120"/>
               </a:rPr>
-              <a:t>全地都看</a:t>
-            </a:r>
-            <a:r>
-              <a:rPr lang="zh-TW" altLang="en-US" sz="6400" b="1" dirty="0">
-                <a:solidFill>
-                  <a:srgbClr val="660033"/>
-                </a:solidFill>
-                <a:latin typeface="微軟正黑體" pitchFamily="34" charset="-120"/>
-                <a:ea typeface="微軟正黑體" pitchFamily="34" charset="-120"/>
-              </a:rPr>
-              <a:t>見</a:t>
+              <a:t>全地都看見</a:t>
             </a:r>
             <a:endParaRPr lang="en-US" altLang="zh-TW" sz="6400" b="1" dirty="0">
               <a:solidFill>
@@ -4002,37 +3778,7 @@
                 <a:latin typeface="微軟正黑體" pitchFamily="34" charset="-120"/>
                 <a:ea typeface="微軟正黑體" pitchFamily="34" charset="-120"/>
               </a:rPr>
-              <a:t>我</a:t>
-            </a:r>
-            <a:r>
-              <a:rPr lang="zh-TW" altLang="en-US" sz="6400" b="1" dirty="0">
-                <a:solidFill>
-                  <a:srgbClr val="660033"/>
-                </a:solidFill>
-                <a:latin typeface="微軟正黑體" pitchFamily="34" charset="-120"/>
-                <a:ea typeface="微軟正黑體" pitchFamily="34" charset="-120"/>
-              </a:rPr>
-              <a:t>神 </a:t>
-            </a:r>
-            <a:r>
-              <a:rPr lang="zh-TW" altLang="en-US" sz="6400" b="1" dirty="0" smtClean="0">
-                <a:solidFill>
-                  <a:srgbClr val="660033"/>
-                </a:solidFill>
-                <a:latin typeface="微軟正黑體" pitchFamily="34" charset="-120"/>
-                <a:ea typeface="微軟正黑體" pitchFamily="34" charset="-120"/>
-              </a:rPr>
-              <a:t>  真</a:t>
-            </a:r>
-            <a:r>
-              <a:rPr lang="zh-TW" altLang="en-US" sz="6400" b="1" dirty="0">
-                <a:solidFill>
-                  <a:srgbClr val="660033"/>
-                </a:solidFill>
-                <a:latin typeface="微軟正黑體" pitchFamily="34" charset="-120"/>
-                <a:ea typeface="微軟正黑體" pitchFamily="34" charset="-120"/>
-              </a:rPr>
-              <a:t>偉大</a:t>
+              <a:t>我神   真偉大</a:t>
             </a:r>
             <a:endParaRPr lang="en-US" altLang="zh-TW" sz="6400" b="1" dirty="0">
               <a:solidFill>
@@ -4078,34 +3824,24 @@
               <a:t>( </a:t>
             </a:r>
             <a:r>
-              <a:rPr lang="zh-CN" altLang="en-US" sz="4267" b="1" dirty="0" smtClean="0">
+              <a:rPr lang="zh-CN" altLang="en-US" sz="4267" b="1" dirty="0">
                 <a:solidFill>
                   <a:srgbClr val="660033"/>
                 </a:solidFill>
                 <a:latin typeface="Microsoft JhengHei" panose="020B0604030504040204" pitchFamily="34" charset="-120"/>
                 <a:ea typeface="Microsoft JhengHei" panose="020B0604030504040204" pitchFamily="34" charset="-120"/>
               </a:rPr>
-              <a:t>副</a:t>
-            </a:r>
-            <a:r>
-              <a:rPr lang="en-US" sz="4267" b="1" dirty="0" smtClean="0">
+              <a:t>副歌</a:t>
+            </a:r>
+            <a:r>
+              <a:rPr lang="en-US" sz="4267" b="1" dirty="0">
                 <a:solidFill>
                   <a:srgbClr val="660033"/>
                 </a:solidFill>
                 <a:latin typeface="Microsoft JhengHei" panose="020B0604030504040204" pitchFamily="34" charset="-120"/>
                 <a:ea typeface="Microsoft JhengHei" panose="020B0604030504040204" pitchFamily="34" charset="-120"/>
               </a:rPr>
-              <a:t> </a:t>
-            </a:r>
-            <a:r>
-              <a:rPr lang="en-US" sz="4267" b="1" dirty="0">
-                <a:solidFill>
-                  <a:srgbClr val="660033"/>
-                </a:solidFill>
-                <a:latin typeface="Microsoft JhengHei" panose="020B0604030504040204" pitchFamily="34" charset="-120"/>
-                <a:ea typeface="Microsoft JhengHei" panose="020B0604030504040204" pitchFamily="34" charset="-120"/>
-              </a:rPr>
-              <a:t>)</a:t>
+              <a:t> )</a:t>
             </a:r>
             <a:endParaRPr lang="vi-VN" sz="4267" b="1" dirty="0">
               <a:solidFill>
@@ -4179,37 +3915,7 @@
                 <a:latin typeface="微軟正黑體" pitchFamily="34" charset="-120"/>
                 <a:ea typeface="微軟正黑體" pitchFamily="34" charset="-120"/>
               </a:rPr>
-              <a:t>昔在永在君王 </a:t>
-            </a:r>
-            <a:r>
-              <a:rPr lang="zh-TW" altLang="en-US" sz="6400" b="1" dirty="0">
-                <a:solidFill>
-                  <a:srgbClr val="660033"/>
-                </a:solidFill>
-                <a:latin typeface="微軟正黑體" pitchFamily="34" charset="-120"/>
-                <a:ea typeface="微軟正黑體" pitchFamily="34" charset="-120"/>
-              </a:rPr>
-              <a:t>  從</a:t>
-            </a:r>
-            <a:r>
-              <a:rPr lang="zh-TW" altLang="en-US" sz="6400" b="1" dirty="0">
-                <a:solidFill>
-                  <a:srgbClr val="660033"/>
-                </a:solidFill>
-                <a:latin typeface="微軟正黑體" pitchFamily="34" charset="-120"/>
-                <a:ea typeface="微軟正黑體" pitchFamily="34" charset="-120"/>
-              </a:rPr>
-              <a:t>今直到永</a:t>
-            </a:r>
-            <a:r>
-              <a:rPr lang="zh-TW" altLang="en-US" sz="6400" b="1" dirty="0">
-                <a:solidFill>
-                  <a:srgbClr val="660033"/>
-                </a:solidFill>
-                <a:latin typeface="微軟正黑體" pitchFamily="34" charset="-120"/>
-                <a:ea typeface="微軟正黑體" pitchFamily="34" charset="-120"/>
-              </a:rPr>
-              <a:t>遠</a:t>
+              <a:t>昔在永在君王   從今直到永遠</a:t>
             </a:r>
             <a:endParaRPr lang="en-US" altLang="zh-TW" sz="6400" b="1" dirty="0">
               <a:solidFill>
@@ -4231,47 +3937,17 @@
                 <a:latin typeface="微軟正黑體" pitchFamily="34" charset="-120"/>
                 <a:ea typeface="微軟正黑體" pitchFamily="34" charset="-120"/>
               </a:rPr>
-              <a:t>袮</a:t>
-            </a:r>
-            <a:r>
-              <a:rPr lang="zh-TW" altLang="en-US" sz="6400" b="1" dirty="0" smtClean="0">
+              <a:t>祢</a:t>
+            </a:r>
+            <a:r>
+              <a:rPr lang="zh-TW" altLang="en-US" sz="6400" b="1" dirty="0">
                 <a:solidFill>
                   <a:srgbClr val="660033"/>
                 </a:solidFill>
                 <a:latin typeface="微軟正黑體" pitchFamily="34" charset="-120"/>
                 <a:ea typeface="微軟正黑體" pitchFamily="34" charset="-120"/>
               </a:rPr>
-              <a:t>從</a:t>
-            </a:r>
-            <a:r>
-              <a:rPr lang="zh-TW" altLang="en-US" sz="6400" b="1" dirty="0">
-                <a:solidFill>
-                  <a:srgbClr val="660033"/>
-                </a:solidFill>
-                <a:latin typeface="微軟正黑體" pitchFamily="34" charset="-120"/>
-                <a:ea typeface="微軟正黑體" pitchFamily="34" charset="-120"/>
-              </a:rPr>
-              <a:t>不曾改變 </a:t>
-            </a:r>
-            <a:r>
-              <a:rPr lang="zh-TW" altLang="en-US" sz="6400" b="1" dirty="0">
-                <a:solidFill>
-                  <a:srgbClr val="660033"/>
-                </a:solidFill>
-                <a:latin typeface="微軟正黑體" pitchFamily="34" charset="-120"/>
-                <a:ea typeface="微軟正黑體" pitchFamily="34" charset="-120"/>
-              </a:rPr>
-              <a:t>  永</a:t>
-            </a:r>
-            <a:r>
-              <a:rPr lang="zh-TW" altLang="en-US" sz="6400" b="1" dirty="0">
-                <a:solidFill>
-                  <a:srgbClr val="660033"/>
-                </a:solidFill>
-                <a:latin typeface="微軟正黑體" pitchFamily="34" charset="-120"/>
-                <a:ea typeface="微軟正黑體" pitchFamily="34" charset="-120"/>
-              </a:rPr>
-              <a:t>存在天地間</a:t>
+              <a:t>從不曾改變   永存在天地間</a:t>
             </a:r>
             <a:endParaRPr lang="en-US" altLang="zh-TW" sz="6400" b="1" dirty="0">
               <a:solidFill>
@@ -4317,17 +3993,17 @@
               <a:t>( </a:t>
             </a:r>
             <a:r>
-              <a:rPr lang="zh-CN" altLang="en-US" sz="4267" b="1" dirty="0" smtClean="0">
+              <a:rPr lang="zh-CN" altLang="en-US" sz="4267" b="1" dirty="0">
                 <a:solidFill>
                   <a:srgbClr val="660033"/>
                 </a:solidFill>
                 <a:latin typeface="Microsoft JhengHei" panose="020B0604030504040204" pitchFamily="34" charset="-120"/>
                 <a:ea typeface="Microsoft JhengHei" panose="020B0604030504040204" pitchFamily="34" charset="-120"/>
               </a:rPr>
-              <a:t>正 </a:t>
-            </a:r>
-            <a:r>
-              <a:rPr lang="en-US" altLang="zh-CN" sz="4267" b="1" dirty="0" smtClean="0">
+              <a:t>正歌 </a:t>
+            </a:r>
+            <a:r>
+              <a:rPr lang="en-US" altLang="zh-CN" sz="4267" b="1" dirty="0">
                 <a:solidFill>
                   <a:srgbClr val="660033"/>
                 </a:solidFill>
@@ -4337,24 +4013,14 @@
               <a:t>2</a:t>
             </a:r>
             <a:r>
-              <a:rPr lang="en-US" sz="4267" b="1" dirty="0" smtClean="0">
+              <a:rPr lang="en-US" sz="4267" b="1" dirty="0">
                 <a:solidFill>
                   <a:srgbClr val="660033"/>
                 </a:solidFill>
                 <a:latin typeface="Microsoft JhengHei" panose="020B0604030504040204" pitchFamily="34" charset="-120"/>
                 <a:ea typeface="Microsoft JhengHei" panose="020B0604030504040204" pitchFamily="34" charset="-120"/>
               </a:rPr>
-              <a:t> </a:t>
-            </a:r>
-            <a:r>
-              <a:rPr lang="en-US" sz="4267" b="1" dirty="0">
-                <a:solidFill>
-                  <a:srgbClr val="660033"/>
-                </a:solidFill>
-                <a:latin typeface="Microsoft JhengHei" panose="020B0604030504040204" pitchFamily="34" charset="-120"/>
-                <a:ea typeface="Microsoft JhengHei" panose="020B0604030504040204" pitchFamily="34" charset="-120"/>
-              </a:rPr>
-              <a:t>)</a:t>
+              <a:t> )</a:t>
             </a:r>
             <a:endParaRPr lang="vi-VN" sz="4267" b="1" dirty="0">
               <a:solidFill>
@@ -4428,57 +4094,17 @@
                 <a:latin typeface="微軟正黑體" pitchFamily="34" charset="-120"/>
                 <a:ea typeface="微軟正黑體" pitchFamily="34" charset="-120"/>
               </a:rPr>
-              <a:t>袮</a:t>
-            </a:r>
-            <a:r>
-              <a:rPr lang="zh-TW" altLang="en-US" sz="6400" b="1" dirty="0" smtClean="0">
+              <a:t>祢</a:t>
+            </a:r>
+            <a:r>
+              <a:rPr lang="zh-TW" altLang="en-US" sz="6400" b="1" dirty="0">
                 <a:solidFill>
                   <a:srgbClr val="660033"/>
                 </a:solidFill>
                 <a:latin typeface="微軟正黑體" pitchFamily="34" charset="-120"/>
                 <a:ea typeface="微軟正黑體" pitchFamily="34" charset="-120"/>
               </a:rPr>
-              <a:t>是</a:t>
-            </a:r>
-            <a:r>
-              <a:rPr lang="zh-TW" altLang="en-US" sz="6400" b="1" dirty="0">
-                <a:solidFill>
-                  <a:srgbClr val="660033"/>
-                </a:solidFill>
-                <a:latin typeface="微軟正黑體" pitchFamily="34" charset="-120"/>
-                <a:ea typeface="微軟正黑體" pitchFamily="34" charset="-120"/>
-              </a:rPr>
-              <a:t>三一真神 </a:t>
-            </a:r>
-            <a:r>
-              <a:rPr lang="zh-TW" altLang="en-US" sz="6400" b="1" dirty="0">
-                <a:solidFill>
-                  <a:srgbClr val="660033"/>
-                </a:solidFill>
-                <a:latin typeface="微軟正黑體" pitchFamily="34" charset="-120"/>
-                <a:ea typeface="微軟正黑體" pitchFamily="34" charset="-120"/>
-              </a:rPr>
-              <a:t>  父</a:t>
-            </a:r>
-            <a:r>
-              <a:rPr lang="zh-TW" altLang="en-US" sz="6400" b="1" dirty="0">
-                <a:solidFill>
-                  <a:srgbClr val="660033"/>
-                </a:solidFill>
-                <a:latin typeface="微軟正黑體" pitchFamily="34" charset="-120"/>
-                <a:ea typeface="微軟正黑體" pitchFamily="34" charset="-120"/>
-              </a:rPr>
-              <a:t>子與聖</a:t>
-            </a:r>
-            <a:r>
-              <a:rPr lang="zh-TW" altLang="en-US" sz="6400" b="1" dirty="0">
-                <a:solidFill>
-                  <a:srgbClr val="660033"/>
-                </a:solidFill>
-                <a:latin typeface="微軟正黑體" pitchFamily="34" charset="-120"/>
-                <a:ea typeface="微軟正黑體" pitchFamily="34" charset="-120"/>
-              </a:rPr>
-              <a:t>靈</a:t>
+              <a:t>是三一真神   父子與聖靈</a:t>
             </a:r>
             <a:endParaRPr lang="en-US" altLang="zh-TW" sz="6400" b="1" dirty="0">
               <a:solidFill>
@@ -4500,37 +4126,7 @@
                 <a:latin typeface="微軟正黑體" pitchFamily="34" charset="-120"/>
                 <a:ea typeface="微軟正黑體" pitchFamily="34" charset="-120"/>
               </a:rPr>
-              <a:t>真</a:t>
-            </a:r>
-            <a:r>
-              <a:rPr lang="zh-TW" altLang="en-US" sz="6400" b="1" dirty="0">
-                <a:solidFill>
-                  <a:srgbClr val="660033"/>
-                </a:solidFill>
-                <a:latin typeface="微軟正黑體" pitchFamily="34" charset="-120"/>
-                <a:ea typeface="微軟正黑體" pitchFamily="34" charset="-120"/>
-              </a:rPr>
-              <a:t>神的羔羊 </a:t>
-            </a:r>
-            <a:r>
-              <a:rPr lang="zh-TW" altLang="en-US" sz="6400" b="1" dirty="0">
-                <a:solidFill>
-                  <a:srgbClr val="660033"/>
-                </a:solidFill>
-                <a:latin typeface="微軟正黑體" pitchFamily="34" charset="-120"/>
-                <a:ea typeface="微軟正黑體" pitchFamily="34" charset="-120"/>
-              </a:rPr>
-              <a:t>  全</a:t>
-            </a:r>
-            <a:r>
-              <a:rPr lang="zh-TW" altLang="en-US" sz="6400" b="1" dirty="0">
-                <a:solidFill>
-                  <a:srgbClr val="660033"/>
-                </a:solidFill>
-                <a:latin typeface="微軟正黑體" pitchFamily="34" charset="-120"/>
-                <a:ea typeface="微軟正黑體" pitchFamily="34" charset="-120"/>
-              </a:rPr>
-              <a:t>能神羔羊</a:t>
+              <a:t>真神的羔羊   全能神羔羊</a:t>
             </a:r>
             <a:endParaRPr lang="en-US" altLang="zh-TW" sz="6400" b="1" dirty="0">
               <a:solidFill>
@@ -4576,17 +4172,17 @@
               <a:t>( </a:t>
             </a:r>
             <a:r>
-              <a:rPr lang="zh-CN" altLang="en-US" sz="4267" b="1" dirty="0" smtClean="0">
+              <a:rPr lang="zh-CN" altLang="en-US" sz="4267" b="1" dirty="0">
                 <a:solidFill>
                   <a:srgbClr val="660033"/>
                 </a:solidFill>
                 <a:latin typeface="Microsoft JhengHei" panose="020B0604030504040204" pitchFamily="34" charset="-120"/>
                 <a:ea typeface="Microsoft JhengHei" panose="020B0604030504040204" pitchFamily="34" charset="-120"/>
               </a:rPr>
-              <a:t>正 </a:t>
-            </a:r>
-            <a:r>
-              <a:rPr lang="en-US" altLang="zh-CN" sz="4267" b="1" dirty="0" smtClean="0">
+              <a:t>正歌 </a:t>
+            </a:r>
+            <a:r>
+              <a:rPr lang="en-US" altLang="zh-CN" sz="4267" b="1" dirty="0">
                 <a:solidFill>
                   <a:srgbClr val="660033"/>
                 </a:solidFill>
@@ -4596,24 +4192,14 @@
               <a:t>2</a:t>
             </a:r>
             <a:r>
-              <a:rPr lang="en-US" sz="4267" b="1" dirty="0" smtClean="0">
+              <a:rPr lang="en-US" sz="4267" b="1" dirty="0">
                 <a:solidFill>
                   <a:srgbClr val="660033"/>
                 </a:solidFill>
                 <a:latin typeface="Microsoft JhengHei" panose="020B0604030504040204" pitchFamily="34" charset="-120"/>
                 <a:ea typeface="Microsoft JhengHei" panose="020B0604030504040204" pitchFamily="34" charset="-120"/>
               </a:rPr>
-              <a:t> </a:t>
-            </a:r>
-            <a:r>
-              <a:rPr lang="en-US" sz="4267" b="1" dirty="0">
-                <a:solidFill>
-                  <a:srgbClr val="660033"/>
-                </a:solidFill>
-                <a:latin typeface="Microsoft JhengHei" panose="020B0604030504040204" pitchFamily="34" charset="-120"/>
-                <a:ea typeface="Microsoft JhengHei" panose="020B0604030504040204" pitchFamily="34" charset="-120"/>
-              </a:rPr>
-              <a:t>)</a:t>
+              <a:t> )</a:t>
             </a:r>
             <a:endParaRPr lang="vi-VN" sz="4267" b="1" dirty="0">
               <a:solidFill>
@@ -4687,57 +4273,17 @@
                 <a:latin typeface="微軟正黑體" pitchFamily="34" charset="-120"/>
                 <a:ea typeface="微軟正黑體" pitchFamily="34" charset="-120"/>
               </a:rPr>
-              <a:t>袮</a:t>
-            </a:r>
-            <a:r>
-              <a:rPr lang="zh-TW" altLang="en-US" sz="6400" b="1" dirty="0" smtClean="0">
+              <a:t>祢</a:t>
+            </a:r>
+            <a:r>
+              <a:rPr lang="zh-TW" altLang="en-US" sz="6400" b="1" dirty="0">
                 <a:solidFill>
                   <a:srgbClr val="660033"/>
                 </a:solidFill>
                 <a:latin typeface="微軟正黑體" pitchFamily="34" charset="-120"/>
                 <a:ea typeface="微軟正黑體" pitchFamily="34" charset="-120"/>
               </a:rPr>
-              <a:t>至</a:t>
-            </a:r>
-            <a:r>
-              <a:rPr lang="zh-TW" altLang="en-US" sz="6400" b="1" dirty="0">
-                <a:solidFill>
-                  <a:srgbClr val="660033"/>
-                </a:solidFill>
-                <a:latin typeface="微軟正黑體" pitchFamily="34" charset="-120"/>
-                <a:ea typeface="微軟正黑體" pitchFamily="34" charset="-120"/>
-              </a:rPr>
-              <a:t>聖尊名 </a:t>
-            </a:r>
-            <a:r>
-              <a:rPr lang="zh-TW" altLang="en-US" sz="6400" b="1" dirty="0">
-                <a:solidFill>
-                  <a:srgbClr val="660033"/>
-                </a:solidFill>
-                <a:latin typeface="微軟正黑體" pitchFamily="34" charset="-120"/>
-                <a:ea typeface="微軟正黑體" pitchFamily="34" charset="-120"/>
-              </a:rPr>
-              <a:t> 配</a:t>
-            </a:r>
-            <a:r>
-              <a:rPr lang="zh-TW" altLang="en-US" sz="6400" b="1" dirty="0">
-                <a:solidFill>
-                  <a:srgbClr val="660033"/>
-                </a:solidFill>
-                <a:latin typeface="微軟正黑體" pitchFamily="34" charset="-120"/>
-                <a:ea typeface="微軟正黑體" pitchFamily="34" charset="-120"/>
-              </a:rPr>
-              <a:t>受大讚</a:t>
-            </a:r>
-            <a:r>
-              <a:rPr lang="zh-TW" altLang="en-US" sz="6400" b="1" dirty="0">
-                <a:solidFill>
-                  <a:srgbClr val="660033"/>
-                </a:solidFill>
-                <a:latin typeface="微軟正黑體" pitchFamily="34" charset="-120"/>
-                <a:ea typeface="微軟正黑體" pitchFamily="34" charset="-120"/>
-              </a:rPr>
-              <a:t>美</a:t>
+              <a:t>至聖尊名  配受大讚美</a:t>
             </a:r>
             <a:endParaRPr lang="en-US" altLang="zh-TW" sz="6400" b="1" dirty="0">
               <a:solidFill>
@@ -4759,57 +4305,7 @@
                 <a:latin typeface="微軟正黑體" pitchFamily="34" charset="-120"/>
                 <a:ea typeface="微軟正黑體" pitchFamily="34" charset="-120"/>
               </a:rPr>
-              <a:t>全</a:t>
-            </a:r>
-            <a:r>
-              <a:rPr lang="zh-TW" altLang="en-US" sz="6400" b="1" dirty="0">
-                <a:solidFill>
-                  <a:srgbClr val="660033"/>
-                </a:solidFill>
-                <a:latin typeface="微軟正黑體" pitchFamily="34" charset="-120"/>
-                <a:ea typeface="微軟正黑體" pitchFamily="34" charset="-120"/>
-              </a:rPr>
-              <a:t>心歌</a:t>
-            </a:r>
-            <a:r>
-              <a:rPr lang="zh-TW" altLang="en-US" sz="6400" b="1" dirty="0">
-                <a:solidFill>
-                  <a:srgbClr val="660033"/>
-                </a:solidFill>
-                <a:latin typeface="微軟正黑體" pitchFamily="34" charset="-120"/>
-                <a:ea typeface="微軟正黑體" pitchFamily="34" charset="-120"/>
-              </a:rPr>
-              <a:t>頌  </a:t>
-            </a:r>
-            <a:r>
-              <a:rPr lang="zh-TW" altLang="en-US" sz="6400" b="1" dirty="0">
-                <a:solidFill>
-                  <a:srgbClr val="660033"/>
-                </a:solidFill>
-                <a:latin typeface="微軟正黑體" pitchFamily="34" charset="-120"/>
-                <a:ea typeface="微軟正黑體" pitchFamily="34" charset="-120"/>
-              </a:rPr>
-              <a:t>我神 </a:t>
-            </a:r>
-            <a:r>
-              <a:rPr lang="zh-TW" altLang="en-US" sz="6400" b="1" dirty="0">
-                <a:solidFill>
-                  <a:srgbClr val="660033"/>
-                </a:solidFill>
-                <a:latin typeface="微軟正黑體" pitchFamily="34" charset="-120"/>
-                <a:ea typeface="微軟正黑體" pitchFamily="34" charset="-120"/>
-              </a:rPr>
-              <a:t> 真</a:t>
-            </a:r>
-            <a:r>
-              <a:rPr lang="zh-TW" altLang="en-US" sz="6400" b="1" dirty="0">
-                <a:solidFill>
-                  <a:srgbClr val="660033"/>
-                </a:solidFill>
-                <a:latin typeface="微軟正黑體" pitchFamily="34" charset="-120"/>
-                <a:ea typeface="微軟正黑體" pitchFamily="34" charset="-120"/>
-              </a:rPr>
-              <a:t>偉大</a:t>
+              <a:t>全心歌頌  我神  真偉大</a:t>
             </a:r>
             <a:endParaRPr lang="en-US" altLang="zh-TW" sz="6400" b="1" dirty="0">
               <a:solidFill>
@@ -4855,7 +4351,7 @@
               <a:t>( </a:t>
             </a:r>
             <a:r>
-              <a:rPr lang="zh-CN" altLang="en-US" sz="4267" b="1" dirty="0" smtClean="0">
+              <a:rPr lang="zh-CN" altLang="en-US" sz="4267" b="1" dirty="0">
                 <a:solidFill>
                   <a:srgbClr val="660033"/>
                 </a:solidFill>
@@ -4865,24 +4361,14 @@
               <a:t>橋</a:t>
             </a:r>
             <a:r>
-              <a:rPr lang="en-US" sz="4267" b="1" dirty="0" smtClean="0">
+              <a:rPr lang="en-US" sz="4267" b="1" dirty="0">
                 <a:solidFill>
                   <a:srgbClr val="660033"/>
                 </a:solidFill>
                 <a:latin typeface="Microsoft JhengHei" panose="020B0604030504040204" pitchFamily="34" charset="-120"/>
                 <a:ea typeface="Microsoft JhengHei" panose="020B0604030504040204" pitchFamily="34" charset="-120"/>
               </a:rPr>
-              <a:t> </a:t>
-            </a:r>
-            <a:r>
-              <a:rPr lang="en-US" sz="4267" b="1" dirty="0">
-                <a:solidFill>
-                  <a:srgbClr val="660033"/>
-                </a:solidFill>
-                <a:latin typeface="Microsoft JhengHei" panose="020B0604030504040204" pitchFamily="34" charset="-120"/>
-                <a:ea typeface="Microsoft JhengHei" panose="020B0604030504040204" pitchFamily="34" charset="-120"/>
-              </a:rPr>
-              <a:t>)</a:t>
+              <a:t> )</a:t>
             </a:r>
             <a:endParaRPr lang="vi-VN" sz="4267" b="1" dirty="0">
               <a:solidFill>
